--- a/docs/presentation/NWSA-Music-Hub-Directors.pptx
+++ b/docs/presentation/NWSA-Music-Hub-Directors.pptx
@@ -705,10 +705,10 @@
           <a:p>
             <a:r>
               <a:rPr lang="en-US" dirty="0"/>
-              <a:t>Schedule Change: swap two blocks, shift a time, move a room, cancel.
-Automatic: tagged as changed + red public banner + offer to post a notice.
-Revert to normal restores the pre-change snapshot and pulls the notice down.
-Close a day = one button cancels everything on a date and posts one notice.
+              <a:t>LIVE DEMO. Pick a real upcoming rehearsal and shift it 15 minutes on screen - don't describe the buttons, tap them.
+The moment you save: point at the public site in a second tab/window - the red banner is already there. That's the whole demo.
+Then show Revert to normal undoing it, banner gone.
+Close a day = one button cancels everything on a date and posts one notice. Mention it; demo only if time allows.
 VERIFY the local phrasing for a school closure day.</a:t>
             </a:r>
             <a:endParaRPr lang="en-US" dirty="0"/>
@@ -797,10 +797,10 @@
           <a:p>
             <a:r>
               <a:rPr lang="en-US" dirty="0"/>
-              <a:t>Temporary roster change: add or pull, one event or a date range, reason required.
-Permanent roster untouched; the change expires itself.
-While active it is real: Sub badge on roll, appears on Who's Out, shows on the student's public schedule.
-One entry can move a student out of one ensemble and into another.</a:t>
+              <a:t>LIVE DEMO. Pull a real student out for one rehearsal on screen - reason required, takes seconds.
+Then show it: the Sub badge on the roll screen, the student on Who's Out, the change on their own public schedule.
+Say it plainly: permanent roster untouched; the change expires itself, nobody has to remember to undo it.
+One entry can move a student out of one ensemble and into another at once.</a:t>
             </a:r>
             <a:endParaRPr lang="en-US" dirty="0"/>
           </a:p>
@@ -888,8 +888,8 @@
           <a:p>
             <a:r>
               <a:rPr lang="en-US" dirty="0"/>
-              <a:t>Per-ensemble or school-wide. Normal / Important / Urgent (site-wide banner).
-Pin, expiry date, schedule for later, and a Spanish field you write yourself (not machine translation).
+              <a:t>LIVE DEMO. Write one real Urgent announcement on screen and post it - watch the site-wide banner appear in the other tab.
+Per-ensemble or school-wide. Normal / Important / Urgent. Pin, expiry date, schedule for later, and a Spanish field you write yourself (not machine translation).
 TEAMS / EMAIL - SAY THE HONEST VERSION. Unless you have watched one arrive: "the app queues it; that last hop is set up outside the app and I will not promise it until I have tested it. Today, treat the banner as the delivery."
 Rule: announcements are public. Nothing private in one.</a:t>
             </a:r>
@@ -1253,11 +1253,10 @@
             <a:r>
               <a:rPr lang="en-US" dirty="0"/>
               <a:t>THE DEAN'S SLIDE. Be precise rather than reassuring.
-Enforced by the database, not by hidden pages.
-Staff only: contacts, attendance, progress notes, private lessons.
-Public on purpose: schedules, concerts, repertoire, announcements - AND student names, instrument, grade, ensemble.
-Say the trade out loud: names are public BECAUSE lookup-without-an-account requires it. Reversible; the cost is student accounts. Their call.
-Announcements are public by design - nothing private in one.</a:t>
+Public, on purpose: schedules, concerts, repertoire, announcements, and a student's name/instrument/section/ensemble - that's it.
+Staff only, always: grade level, pronunciation, contact details, attendance, progress notes, private lessons.
+Say the trade out loud: names are public BECAUSE lookup-without-an-account requires it. Grade was never part of that trade and never appears publicly.
+If asked how it's enforced: two layers - which collections the public site can even query, and a field allowlist on top of that, so a bug in the app can't leak grade even by accident.</a:t>
             </a:r>
             <a:endParaRPr lang="en-US" dirty="0"/>
           </a:p>
@@ -1888,7 +1887,7 @@
             <a:r>
               <a:rPr lang="en-US" dirty="0"/>
               <a:t>Read the open items aloud before taking questions - edit the list to match what is true on the day.
-No measured time savings. Teams/email relay unverified. Student names public by design. Maintenance is you.
+No measured time savings. Teams/email relay unverified. Grade level is NOT public anywhere - only name/instrument/section/ensemble are. Maintenance is you.
 Add anything you promised to find out during the talk.
 Then: "What did I miss, and what is going to break?" - and STOP TALKING. Let the silence work.</a:t>
             </a:r>
@@ -4063,7 +4062,7 @@
                 <a:ea typeface="Calibri" pitchFamily="34" charset="-122"/>
                 <a:cs typeface="Calibri" pitchFamily="34" charset="-120"/>
               </a:rPr>
-              <a:t>SCHEDULE CHANGE</a:t>
+              <a:t>LIVE — SCHEDULE CHANGE</a:t>
             </a:r>
             <a:endParaRPr lang="en-US" sz="1200" dirty="0"/>
           </a:p>
@@ -4963,7 +4962,7 @@
                 <a:ea typeface="Calibri" pitchFamily="34" charset="-122"/>
                 <a:cs typeface="Calibri" pitchFamily="34" charset="-120"/>
               </a:rPr>
-              <a:t>TEMPORARY ROSTER CHANGES</a:t>
+              <a:t>LIVE — TEMPORARY ROSTER CHANGES</a:t>
             </a:r>
             <a:endParaRPr lang="en-US" sz="1200" dirty="0"/>
           </a:p>
@@ -5460,7 +5459,7 @@
                 <a:ea typeface="Calibri" pitchFamily="34" charset="-122"/>
                 <a:cs typeface="Calibri" pitchFamily="34" charset="-120"/>
               </a:rPr>
-              <a:t>ANNOUNCEMENTS</a:t>
+              <a:t>LIVE — ANNOUNCEMENTS</a:t>
             </a:r>
             <a:endParaRPr lang="en-US" sz="1200" dirty="0"/>
           </a:p>
@@ -8068,11 +8067,11 @@
         <p:spPr>
           <a:xfrm>
             <a:off x="640080" y="1737360"/>
-            <a:ext cx="5394960" cy="2377440"/>
+            <a:ext cx="5394960" cy="2651760"/>
           </a:xfrm>
           <a:prstGeom prst="roundRect">
             <a:avLst>
-              <a:gd name="adj" fmla="val 3462"/>
+              <a:gd name="adj" fmla="val 3103"/>
             </a:avLst>
           </a:prstGeom>
           <a:solidFill>
@@ -8141,7 +8140,7 @@
         <p:spPr>
           <a:xfrm>
             <a:off x="1005840" y="2423160"/>
-            <a:ext cx="4663440" cy="1463040"/>
+            <a:ext cx="4663440" cy="1828800"/>
           </a:xfrm>
           <a:prstGeom prst="rect">
             <a:avLst/>
@@ -8169,7 +8168,7 @@
                 <a:ea typeface="Calibri" pitchFamily="34" charset="-122"/>
                 <a:cs typeface="Calibri" pitchFamily="34" charset="-120"/>
               </a:rPr>
-              <a:t>Contact details for students and guardians</a:t>
+              <a:t>Grade level and pronunciation guide</a:t>
             </a:r>
             <a:endParaRPr lang="en-US" sz="1500" dirty="0"/>
           </a:p>
@@ -8190,7 +8189,7 @@
                 <a:ea typeface="Calibri" pitchFamily="34" charset="-122"/>
                 <a:cs typeface="Calibri" pitchFamily="34" charset="-120"/>
               </a:rPr>
-              <a:t>Attendance records</a:t>
+              <a:t>Contact details for students and guardians</a:t>
             </a:r>
             <a:endParaRPr lang="en-US" sz="1500" dirty="0"/>
           </a:p>
@@ -8211,7 +8210,7 @@
                 <a:ea typeface="Calibri" pitchFamily="34" charset="-122"/>
                 <a:cs typeface="Calibri" pitchFamily="34" charset="-120"/>
               </a:rPr>
-              <a:t>Progress notes</a:t>
+              <a:t>Attendance records</a:t>
             </a:r>
             <a:endParaRPr lang="en-US" sz="1500" dirty="0"/>
           </a:p>
@@ -8232,6 +8231,27 @@
                 <a:ea typeface="Calibri" pitchFamily="34" charset="-122"/>
                 <a:cs typeface="Calibri" pitchFamily="34" charset="-120"/>
               </a:rPr>
+              <a:t>Progress notes</a:t>
+            </a:r>
+            <a:endParaRPr lang="en-US" sz="1500" dirty="0"/>
+          </a:p>
+          <a:p>
+            <a:pPr marL="342900" indent="-342900">
+              <a:spcAft>
+                <a:spcPts val="800"/>
+              </a:spcAft>
+              <a:buSzPct val="100000"/>
+              <a:buChar char="•"/>
+            </a:pPr>
+            <a:r>
+              <a:rPr lang="en-US" sz="1500" dirty="0">
+                <a:solidFill>
+                  <a:srgbClr val="CFE6EA"/>
+                </a:solidFill>
+                <a:latin typeface="Calibri" pitchFamily="34" charset="0"/>
+                <a:ea typeface="Calibri" pitchFamily="34" charset="-122"/>
+                <a:cs typeface="Calibri" pitchFamily="34" charset="-120"/>
+              </a:rPr>
               <a:t>Private lesson schedules</a:t>
             </a:r>
             <a:endParaRPr lang="en-US" sz="1500" dirty="0"/>
@@ -8247,11 +8267,11 @@
         <p:spPr>
           <a:xfrm>
             <a:off x="6156655" y="1737360"/>
-            <a:ext cx="5394960" cy="2377440"/>
+            <a:ext cx="5394960" cy="2651760"/>
           </a:xfrm>
           <a:prstGeom prst="roundRect">
             <a:avLst>
-              <a:gd name="adj" fmla="val 3462"/>
+              <a:gd name="adj" fmla="val 3103"/>
             </a:avLst>
           </a:prstGeom>
           <a:solidFill>
@@ -8320,7 +8340,7 @@
         <p:spPr>
           <a:xfrm>
             <a:off x="6522415" y="2423160"/>
-            <a:ext cx="4663440" cy="1463040"/>
+            <a:ext cx="4663440" cy="1828800"/>
           </a:xfrm>
           <a:prstGeom prst="rect">
             <a:avLst/>
@@ -8411,7 +8431,7 @@
                 <a:ea typeface="Calibri" pitchFamily="34" charset="-122"/>
                 <a:cs typeface="Calibri" pitchFamily="34" charset="-120"/>
               </a:rPr>
-              <a:t>Student names, instrument, grade, ensemble</a:t>
+              <a:t>Student name, instrument, section, ensemble</a:t>
             </a:r>
             <a:endParaRPr lang="en-US" sz="1500" dirty="0"/>
           </a:p>
@@ -8425,24 +8445,24 @@
         </p:nvSpPr>
         <p:spPr>
           <a:xfrm>
-            <a:off x="640080" y="4297680"/>
-            <a:ext cx="10911535" cy="411480"/>
-          </a:xfrm>
-          <a:prstGeom prst="rect">
-            <a:avLst/>
-          </a:prstGeom>
-          <a:noFill/>
-          <a:ln/>
-        </p:spPr>
-        <p:txBody>
-          <a:bodyPr wrap="square" lIns="0" tIns="0" rIns="0" bIns="0" rtlCol="0" anchor="ctr"/>
-          <a:lstStyle/>
-          <a:p>
-            <a:pPr indent="0" marL="0">
-              <a:buNone/>
-            </a:pPr>
-            <a:r>
-              <a:rPr lang="en-US" sz="1600" dirty="0">
+            <a:off x="640080" y="4572000"/>
+            <a:ext cx="10911535" cy="502920"/>
+          </a:xfrm>
+          <a:prstGeom prst="rect">
+            <a:avLst/>
+          </a:prstGeom>
+          <a:noFill/>
+          <a:ln/>
+        </p:spPr>
+        <p:txBody>
+          <a:bodyPr wrap="square" lIns="0" tIns="0" rIns="0" bIns="0" rtlCol="0" anchor="ctr"/>
+          <a:lstStyle/>
+          <a:p>
+            <a:pPr indent="0" marL="0">
+              <a:buNone/>
+            </a:pPr>
+            <a:r>
+              <a:rPr lang="en-US" sz="1550" dirty="0">
                 <a:solidFill>
                   <a:srgbClr val="17272B"/>
                 </a:solidFill>
@@ -8450,9 +8470,9 @@
                 <a:ea typeface="Calibri" pitchFamily="34" charset="-122"/>
                 <a:cs typeface="Calibri" pitchFamily="34" charset="-120"/>
               </a:rPr>
-              <a:t>The line between them is enforced by the database itself — not by hiding a page. Knowing the address doesn’t get the data out.</a:t>
-            </a:r>
-            <a:endParaRPr lang="en-US" sz="1600" dirty="0"/>
+              <a:t>The line is enforced twice: what the public site is even allowed to ask for, and separately, by name, what fields that answer is allowed to contain. Grade never crosses it, in either direction.</a:t>
+            </a:r>
+            <a:endParaRPr lang="en-US" sz="1550" dirty="0"/>
           </a:p>
         </p:txBody>
       </p:sp>
@@ -8464,12 +8484,12 @@
         </p:nvSpPr>
         <p:spPr>
           <a:xfrm>
-            <a:off x="640080" y="4846320"/>
-            <a:ext cx="10911535" cy="1280160"/>
+            <a:off x="640080" y="5166360"/>
+            <a:ext cx="10911535" cy="1051560"/>
           </a:xfrm>
           <a:prstGeom prst="roundRect">
             <a:avLst>
-              <a:gd name="adj" fmla="val 7143"/>
+              <a:gd name="adj" fmla="val 8696"/>
             </a:avLst>
           </a:prstGeom>
           <a:solidFill>
@@ -8491,7 +8511,7 @@
         </p:nvSpPr>
         <p:spPr>
           <a:xfrm>
-            <a:off x="960120" y="4983480"/>
+            <a:off x="960120" y="5303520"/>
             <a:ext cx="10271455" cy="365760"/>
           </a:xfrm>
           <a:prstGeom prst="rect">
@@ -8508,7 +8528,7 @@
               <a:buNone/>
             </a:pPr>
             <a:r>
-              <a:rPr lang="en-US" sz="1700" b="1" dirty="0">
+              <a:rPr lang="en-US" sz="1650" b="1" dirty="0">
                 <a:solidFill>
                   <a:srgbClr val="5A4A22"/>
                 </a:solidFill>
@@ -8516,9 +8536,9 @@
                 <a:ea typeface="Calibri" pitchFamily="34" charset="-122"/>
                 <a:cs typeface="Calibri" pitchFamily="34" charset="-120"/>
               </a:rPr>
-              <a:t>Student names are public — and that is a decision, not an accident.</a:t>
-            </a:r>
-            <a:endParaRPr lang="en-US" sz="1700" dirty="0"/>
+              <a:t>Names are public so a student can find their own schedule without an account.</a:t>
+            </a:r>
+            <a:endParaRPr lang="en-US" sz="1650" dirty="0"/>
           </a:p>
         </p:txBody>
       </p:sp>
@@ -8530,24 +8550,24 @@
         </p:nvSpPr>
         <p:spPr>
           <a:xfrm>
-            <a:off x="960120" y="5376672"/>
-            <a:ext cx="10271455" cy="640080"/>
-          </a:xfrm>
-          <a:prstGeom prst="rect">
-            <a:avLst/>
-          </a:prstGeom>
-          <a:noFill/>
-          <a:ln/>
-        </p:spPr>
-        <p:txBody>
-          <a:bodyPr wrap="square" lIns="0" tIns="0" rIns="0" bIns="0" rtlCol="0" anchor="ctr"/>
-          <a:lstStyle/>
-          <a:p>
-            <a:pPr indent="0" marL="0">
-              <a:buNone/>
-            </a:pPr>
-            <a:r>
-              <a:rPr lang="en-US" sz="1400" dirty="0">
+            <a:off x="960120" y="5650992"/>
+            <a:ext cx="10271455" cy="502920"/>
+          </a:xfrm>
+          <a:prstGeom prst="rect">
+            <a:avLst/>
+          </a:prstGeom>
+          <a:noFill/>
+          <a:ln/>
+        </p:spPr>
+        <p:txBody>
+          <a:bodyPr wrap="square" lIns="0" tIns="0" rIns="0" bIns="0" rtlCol="0" anchor="ctr"/>
+          <a:lstStyle/>
+          <a:p>
+            <a:pPr indent="0" marL="0">
+              <a:buNone/>
+            </a:pPr>
+            <a:r>
+              <a:rPr lang="en-US" sz="1350" dirty="0">
                 <a:solidFill>
                   <a:srgbClr val="5A4A22"/>
                 </a:solidFill>
@@ -8555,9 +8575,9 @@
                 <a:ea typeface="Calibri" pitchFamily="34" charset="-122"/>
                 <a:cs typeface="Calibri" pitchFamily="34" charset="-120"/>
               </a:rPr>
-              <a:t>The site lets a student find their own schedule without an account, and to do that it has to show a list of names. It’s reversible — the cost of reversing it is giving every student a login. Your call, made knowing the trade.</a:t>
-            </a:r>
-            <a:endParaRPr lang="en-US" sz="1400" dirty="0"/>
+              <a:t>Grade level was never part of that trade — it stays behind sign-in with everything else on the left. That line is a decision the two of us can revisit; it isn’t a default.</a:t>
+            </a:r>
+            <a:endParaRPr lang="en-US" sz="1350" dirty="0"/>
           </a:p>
         </p:txBody>
       </p:sp>
@@ -13001,7 +13021,7 @@
                 <a:ea typeface="Calibri" pitchFamily="34" charset="-122"/>
                 <a:cs typeface="Calibri" pitchFamily="34" charset="-120"/>
               </a:rPr>
-              <a:t>That student names stay private — they’re public by design, and reversible</a:t>
+              <a:t>That grade level is public anywhere — it isn’t; only name, instrument, section and ensemble are</a:t>
             </a:r>
             <a:endParaRPr lang="en-US" sz="1450" dirty="0"/>
           </a:p>
@@ -15006,7 +15026,7 @@
         <p:spPr>
           <a:xfrm>
             <a:off x="1207008" y="1783080"/>
-            <a:ext cx="5833872" cy="310896"/>
+            <a:ext cx="5376672" cy="310896"/>
           </a:xfrm>
           <a:prstGeom prst="rect">
             <a:avLst/>
@@ -15045,7 +15065,7 @@
         <p:spPr>
           <a:xfrm>
             <a:off x="1207008" y="2112264"/>
-            <a:ext cx="5833872" cy="777240"/>
+            <a:ext cx="5376672" cy="777240"/>
           </a:xfrm>
           <a:prstGeom prst="rect">
             <a:avLst/>
@@ -15143,7 +15163,7 @@
         <p:spPr>
           <a:xfrm>
             <a:off x="1207008" y="2990088"/>
-            <a:ext cx="5833872" cy="310896"/>
+            <a:ext cx="5376672" cy="310896"/>
           </a:xfrm>
           <a:prstGeom prst="rect">
             <a:avLst/>
@@ -15182,7 +15202,7 @@
         <p:spPr>
           <a:xfrm>
             <a:off x="1207008" y="3319272"/>
-            <a:ext cx="5833872" cy="777240"/>
+            <a:ext cx="5376672" cy="777240"/>
           </a:xfrm>
           <a:prstGeom prst="rect">
             <a:avLst/>
@@ -15280,7 +15300,7 @@
         <p:spPr>
           <a:xfrm>
             <a:off x="1207008" y="4197096"/>
-            <a:ext cx="5833872" cy="310896"/>
+            <a:ext cx="5376672" cy="310896"/>
           </a:xfrm>
           <a:prstGeom prst="rect">
             <a:avLst/>
@@ -15319,7 +15339,7 @@
         <p:spPr>
           <a:xfrm>
             <a:off x="1207008" y="4526280"/>
-            <a:ext cx="5833872" cy="777240"/>
+            <a:ext cx="5376672" cy="777240"/>
           </a:xfrm>
           <a:prstGeom prst="rect">
             <a:avLst/>
@@ -15357,12 +15377,12 @@
         </p:nvSpPr>
         <p:spPr>
           <a:xfrm>
-            <a:off x="7498080" y="1783080"/>
-            <a:ext cx="4053535" cy="2697480"/>
+            <a:off x="7040880" y="1783080"/>
+            <a:ext cx="4510735" cy="3017520"/>
           </a:xfrm>
           <a:prstGeom prst="roundRect">
             <a:avLst>
-              <a:gd name="adj" fmla="val 3051"/>
+              <a:gd name="adj" fmla="val 2727"/>
             </a:avLst>
           </a:prstGeom>
           <a:solidFill>
@@ -15391,8 +15411,8 @@
         </p:nvSpPr>
         <p:spPr>
           <a:xfrm>
-            <a:off x="7818120" y="2103120"/>
-            <a:ext cx="3413455" cy="1371600"/>
+            <a:off x="7360920" y="2103120"/>
+            <a:ext cx="3870655" cy="1508760"/>
           </a:xfrm>
           <a:prstGeom prst="rect">
             <a:avLst/>
@@ -15411,7 +15431,7 @@
               <a:buNone/>
             </a:pPr>
             <a:r>
-              <a:rPr lang="en-US" sz="2300" b="1" dirty="0">
+              <a:rPr lang="en-US" sz="2200" b="1" dirty="0">
                 <a:solidFill>
                   <a:srgbClr val="FFFFFF"/>
                 </a:solidFill>
@@ -15421,7 +15441,7 @@
               </a:rPr>
               <a:t>No account.</a:t>
             </a:r>
-            <a:endParaRPr lang="en-US" sz="2300" dirty="0"/>
+            <a:endParaRPr lang="en-US" sz="2200" dirty="0"/>
           </a:p>
           <a:p>
             <a:pPr indent="0" marL="0">
@@ -15431,7 +15451,7 @@
               <a:buNone/>
             </a:pPr>
             <a:r>
-              <a:rPr lang="en-US" sz="2300" b="1" dirty="0">
+              <a:rPr lang="en-US" sz="2200" b="1" dirty="0">
                 <a:solidFill>
                   <a:srgbClr val="FFFFFF"/>
                 </a:solidFill>
@@ -15439,9 +15459,9 @@
                 <a:ea typeface="Cambria" pitchFamily="34" charset="-122"/>
                 <a:cs typeface="Cambria" pitchFamily="34" charset="-120"/>
               </a:rPr>
-              <a:t>No password to reset.</a:t>
-            </a:r>
-            <a:endParaRPr lang="en-US" sz="2300" dirty="0"/>
+              <a:t>No password.</a:t>
+            </a:r>
+            <a:endParaRPr lang="en-US" sz="2200" dirty="0"/>
           </a:p>
           <a:p>
             <a:pPr indent="0" marL="0">
@@ -15451,7 +15471,7 @@
               <a:buNone/>
             </a:pPr>
             <a:r>
-              <a:rPr lang="en-US" sz="2300" b="1" dirty="0">
+              <a:rPr lang="en-US" sz="2200" b="1" dirty="0">
                 <a:solidFill>
                   <a:srgbClr val="FFFFFF"/>
                 </a:solidFill>
@@ -15459,9 +15479,9 @@
                 <a:ea typeface="Cambria" pitchFamily="34" charset="-122"/>
                 <a:cs typeface="Cambria" pitchFamily="34" charset="-120"/>
               </a:rPr>
-              <a:t>Nothing to download.</a:t>
-            </a:r>
-            <a:endParaRPr lang="en-US" sz="2300" dirty="0"/>
+              <a:t>Nothing to install.</a:t>
+            </a:r>
+            <a:endParaRPr lang="en-US" sz="2200" dirty="0"/>
           </a:p>
         </p:txBody>
       </p:sp>
@@ -15473,8 +15493,8 @@
         </p:nvSpPr>
         <p:spPr>
           <a:xfrm>
-            <a:off x="7818120" y="3566160"/>
-            <a:ext cx="3413455" cy="731520"/>
+            <a:off x="7360920" y="3794760"/>
+            <a:ext cx="3870655" cy="731520"/>
           </a:xfrm>
           <a:prstGeom prst="rect">
             <a:avLst/>
